--- a/classes/parte-8-blue-team-deteccion-y-soc/186-escritura-de-reglas-de-deteccion-con-sigma/clase-186-presentacion.pptx
+++ b/classes/parte-8-blue-team-deteccion-y-soc/186-escritura-de-reglas-de-deteccion-con-sigma/clase-186-presentacion.pptx
@@ -17,6 +17,11 @@
     <p:sldId id="265" r:id="rId16"/>
     <p:sldId id="266" r:id="rId17"/>
     <p:sldId id="267" r:id="rId18"/>
+    <p:sldId id="268" r:id="rId19"/>
+    <p:sldId id="269" r:id="rId20"/>
+    <p:sldId id="270" r:id="rId21"/>
+    <p:sldId id="271" r:id="rId22"/>
+    <p:sldId id="272" r:id="rId23"/>
   </p:sldIdLst>
   <p:sldSz cx="9144000" cy="6858000" type="screen4x3"/>
   <p:notesSz cx="6858000" cy="9144000"/>
@@ -3198,7 +3203,7 @@
                   <a:srgbClr val="0B3D2E"/>
                 </a:solidFill>
               </a:rPr>
-              <a:t>⚠️ Errores comunes</a:t>
+              <a:t>🧰 Herramientas y preparación</a:t>
             </a:r>
           </a:p>
         </p:txBody>
@@ -3236,67 +3241,67 @@
                   <a:srgbClr val="22282E"/>
                 </a:solidFill>
               </a:rPr>
-              <a:t>•  sigma convert falla por pipeline — Falta el pipeline (ECS/CIM); instala/indica -p correcto</a:t>
-            </a:r>
-          </a:p>
-          <a:p>
-            <a:pPr>
-              <a:spcAft>
-                <a:spcPts val="600"/>
-              </a:spcAft>
-            </a:pPr>
-            <a:r>
-              <a:rPr sz="1500">
-                <a:solidFill>
-                  <a:srgbClr val="22282E"/>
-                </a:solidFill>
-              </a:rPr>
-              <a:t>•  La consulta no matchea campos — Nombres de campo distintos en tu SIEM; usa el pipeline de mapeo</a:t>
-            </a:r>
-          </a:p>
-          <a:p>
-            <a:pPr>
-              <a:spcAft>
-                <a:spcPts val="600"/>
-              </a:spcAft>
-            </a:pPr>
-            <a:r>
-              <a:rPr sz="1500">
-                <a:solidFill>
-                  <a:srgbClr val="22282E"/>
-                </a:solidFill>
-              </a:rPr>
-              <a:t>•  Regla dispara con todo — condition demasiado amplia; añade selecciones y filtros</a:t>
-            </a:r>
-          </a:p>
-          <a:p>
-            <a:pPr>
-              <a:spcAft>
-                <a:spcPts val="600"/>
-              </a:spcAft>
-            </a:pPr>
-            <a:r>
-              <a:rPr sz="1500">
-                <a:solidFill>
-                  <a:srgbClr val="22282E"/>
-                </a:solidFill>
-              </a:rPr>
-              <a:t>•  Wildcards no funcionan — Usaste  sin modificador; emplea \</a:t>
-            </a:r>
-          </a:p>
-          <a:p>
-            <a:pPr>
-              <a:spcAft>
-                <a:spcPts val="600"/>
-              </a:spcAft>
-            </a:pPr>
-            <a:r>
-              <a:rPr sz="1500">
-                <a:solidFill>
-                  <a:srgbClr val="22282E"/>
-                </a:solidFill>
-              </a:rPr>
-              <a:t>•  YAML inválido — Indentación o listas mal formadas; valida con linter</a:t>
+              <a:t>•  sigma-cli (pip install sigma-cli) con los plugins de backend (sigma plugin install splunk, elasticsearch).</a:t>
+            </a:r>
+          </a:p>
+          <a:p>
+            <a:pPr>
+              <a:spcAft>
+                <a:spcPts val="600"/>
+              </a:spcAft>
+            </a:pPr>
+            <a:r>
+              <a:rPr sz="1500">
+                <a:solidFill>
+                  <a:srgbClr val="22282E"/>
+                </a:solidFill>
+              </a:rPr>
+              <a:t>•  El repositorio SigmaHQ clonado como referencia y banco de ejemplos.</a:t>
+            </a:r>
+          </a:p>
+          <a:p>
+            <a:pPr>
+              <a:spcAft>
+                <a:spcPts val="600"/>
+              </a:spcAft>
+            </a:pPr>
+            <a:r>
+              <a:rPr sz="1500">
+                <a:solidFill>
+                  <a:srgbClr val="22282E"/>
+                </a:solidFill>
+              </a:rPr>
+              <a:t>•  Un SIEM de las clases anteriores (Splunk o Elastic) para probar las conversiones.</a:t>
+            </a:r>
+          </a:p>
+          <a:p>
+            <a:pPr>
+              <a:spcAft>
+                <a:spcPts val="600"/>
+              </a:spcAft>
+            </a:pPr>
+            <a:r>
+              <a:rPr sz="1500">
+                <a:solidFill>
+                  <a:srgbClr val="22282E"/>
+                </a:solidFill>
+              </a:rPr>
+              <a:t>•  Un editor con validación YAML.</a:t>
+            </a:r>
+          </a:p>
+          <a:p>
+            <a:pPr>
+              <a:spcAft>
+                <a:spcPts val="600"/>
+              </a:spcAft>
+            </a:pPr>
+            <a:r>
+              <a:rPr sz="1500">
+                <a:solidFill>
+                  <a:srgbClr val="22282E"/>
+                </a:solidFill>
+              </a:rPr>
+              <a:t>•  Prueba las reglas contra datos de laboratorio o el dataset BOTS; no las apliques a sistemas ajenos.</a:t>
             </a:r>
           </a:p>
         </p:txBody>
@@ -3347,7 +3352,7 @@
                   <a:srgbClr val="0B3D2E"/>
                 </a:solidFill>
               </a:rPr>
-              <a:t>❓ Preguntas frecuentes</a:t>
+              <a:t>🧪 Laboratorio guiado — De YAML a alerta</a:t>
             </a:r>
           </a:p>
         </p:txBody>
@@ -3385,82 +3390,97 @@
                   <a:srgbClr val="22282E"/>
                 </a:solidFill>
               </a:rPr>
-              <a:t>•  ❓ ¿Sigma reemplaza al lenguaje de mi SIEM?</a:t>
-            </a:r>
-          </a:p>
-          <a:p>
-            <a:pPr>
-              <a:spcAft>
-                <a:spcPts val="600"/>
-              </a:spcAft>
-            </a:pPr>
-            <a:r>
-              <a:rPr sz="1500">
-                <a:solidFill>
-                  <a:srgbClr val="22282E"/>
-                </a:solidFill>
-              </a:rPr>
-              <a:t>•  No lo reemplaza: lo genera. Escribes en Sigma y compilas a SPL/EQL/KQL. Ganas portabilidad y una única fuente de verdad para tus detecciones.</a:t>
-            </a:r>
-          </a:p>
-          <a:p>
-            <a:pPr>
-              <a:spcAft>
-                <a:spcPts val="600"/>
-              </a:spcAft>
-            </a:pPr>
-            <a:r>
-              <a:rPr sz="1500">
-                <a:solidFill>
-                  <a:srgbClr val="22282E"/>
-                </a:solidFill>
-              </a:rPr>
-              <a:t>•  ❓ ¿Puedo versionar mis reglas como código?</a:t>
-            </a:r>
-          </a:p>
-          <a:p>
-            <a:pPr>
-              <a:spcAft>
-                <a:spcPts val="600"/>
-              </a:spcAft>
-            </a:pPr>
-            <a:r>
-              <a:rPr sz="1500">
-                <a:solidFill>
-                  <a:srgbClr val="22282E"/>
-                </a:solidFill>
-              </a:rPr>
-              <a:t>•  Sí, y deberías. Guarda tu carpeta de reglas en un repositorio, con revisión y CI que valide sintaxis y conversión (detección como código, clase 199).</a:t>
-            </a:r>
-          </a:p>
-          <a:p>
-            <a:pPr>
-              <a:spcAft>
-                <a:spcPts val="600"/>
-              </a:spcAft>
-            </a:pPr>
-            <a:r>
-              <a:rPr sz="1500">
-                <a:solidFill>
-                  <a:srgbClr val="22282E"/>
-                </a:solidFill>
-              </a:rPr>
-              <a:t>•  ❓ ¿Debo usar las reglas de SigmaHQ tal cual?</a:t>
-            </a:r>
-          </a:p>
-          <a:p>
-            <a:pPr>
-              <a:spcAft>
-                <a:spcPts val="600"/>
-              </a:spcAft>
-            </a:pPr>
-            <a:r>
-              <a:rPr sz="1500">
-                <a:solidFill>
-                  <a:srgbClr val="22282E"/>
-                </a:solidFill>
-              </a:rPr>
-              <a:t>•  Úsalas como base, pero adáptalas: cada entorno tiene sus falsos positivos. Copiar sin afinar genera fatiga de alertas.</a:t>
+              <a:t>•  Instala la CLI. pip install sigma-cli y luego sigma plugin install splunk elasticsearch.</a:t>
+            </a:r>
+          </a:p>
+          <a:p>
+            <a:pPr>
+              <a:spcAft>
+                <a:spcPts val="600"/>
+              </a:spcAft>
+            </a:pPr>
+            <a:r>
+              <a:rPr sz="1500">
+                <a:solidFill>
+                  <a:srgbClr val="22282E"/>
+                </a:solidFill>
+              </a:rPr>
+              <a:t>•  Escribe una regla. Guarda officespawnspowershell.yml:</a:t>
+            </a:r>
+          </a:p>
+          <a:p>
+            <a:pPr>
+              <a:spcAft>
+                <a:spcPts val="600"/>
+              </a:spcAft>
+            </a:pPr>
+            <a:r>
+              <a:rPr sz="1500">
+                <a:solidFill>
+                  <a:srgbClr val="22282E"/>
+                </a:solidFill>
+              </a:rPr>
+              <a:t>•  Valida y convierte a Splunk. sigma convert -t splunk -p splunkwindows officespawnspowershell.yml.</a:t>
+            </a:r>
+          </a:p>
+          <a:p>
+            <a:pPr>
+              <a:spcAft>
+                <a:spcPts val="600"/>
+              </a:spcAft>
+            </a:pPr>
+            <a:r>
+              <a:rPr sz="1500">
+                <a:solidFill>
+                  <a:srgbClr val="22282E"/>
+                </a:solidFill>
+              </a:rPr>
+              <a:t>•  Convierte a Elastic. sigma convert -t esql -p ecswindows officespawnspowershell.yml (o el backend/pipeline que uses).</a:t>
+            </a:r>
+          </a:p>
+          <a:p>
+            <a:pPr>
+              <a:spcAft>
+                <a:spcPts val="600"/>
+              </a:spcAft>
+            </a:pPr>
+            <a:r>
+              <a:rPr sz="1500">
+                <a:solidFill>
+                  <a:srgbClr val="22282E"/>
+                </a:solidFill>
+              </a:rPr>
+              <a:t>•  Prueba en el SIEM. Pega la consulta generada y confirma que detecta tu simulación (Office→PowerShell) sin marcar la línea base.</a:t>
+            </a:r>
+          </a:p>
+          <a:p>
+            <a:pPr>
+              <a:spcAft>
+                <a:spcPts val="600"/>
+              </a:spcAft>
+            </a:pPr>
+            <a:r>
+              <a:rPr sz="1500">
+                <a:solidFill>
+                  <a:srgbClr val="22282E"/>
+                </a:solidFill>
+              </a:rPr>
+              <a:t>•  Añade un filtro. Excluye una cuenta de servicio benigna con una selección filter y condition: selection and not filter.</a:t>
+            </a:r>
+          </a:p>
+          <a:p>
+            <a:pPr>
+              <a:spcAft>
+                <a:spcPts val="600"/>
+              </a:spcAft>
+            </a:pPr>
+            <a:r>
+              <a:rPr sz="1500">
+                <a:solidFill>
+                  <a:srgbClr val="22282E"/>
+                </a:solidFill>
+              </a:rPr>
+              <a:t>•  Explora SigmaHQ. Toma una regla real del repo, adáptala a tu entorno y conviértela.</a:t>
             </a:r>
           </a:p>
         </p:txBody>
@@ -3511,7 +3531,7 @@
                   <a:srgbClr val="0B3D2E"/>
                 </a:solidFill>
               </a:rPr>
-              <a:t>🔗 Referencias</a:t>
+              <a:t>✍️ Ejercicios</a:t>
             </a:r>
           </a:p>
         </p:txBody>
@@ -3549,71 +3569,727 @@
                   <a:srgbClr val="22282E"/>
                 </a:solidFill>
               </a:rPr>
-              <a:t>•  SigmaHQ (repositorio y specification) — &lt;https://github.com/SigmaHQ/sigma&gt;</a:t>
-            </a:r>
-          </a:p>
-          <a:p>
-            <a:pPr>
-              <a:spcAft>
-                <a:spcPts val="600"/>
-              </a:spcAft>
-            </a:pPr>
-            <a:r>
-              <a:rPr sz="1500">
-                <a:solidFill>
-                  <a:srgbClr val="22282E"/>
-                </a:solidFill>
-              </a:rPr>
-              <a:t>•  Sigma Specification — &lt;https://github.com/SigmaHQ/sigma-specification&gt;</a:t>
-            </a:r>
-          </a:p>
-          <a:p>
-            <a:pPr>
-              <a:spcAft>
-                <a:spcPts val="600"/>
-              </a:spcAft>
-            </a:pPr>
-            <a:r>
-              <a:rPr sz="1500">
-                <a:solidFill>
-                  <a:srgbClr val="22282E"/>
-                </a:solidFill>
-              </a:rPr>
-              <a:t>•  sigma-cli / pySigma — &lt;https://github.com/SigmaHQ/sigma-cli&gt;</a:t>
-            </a:r>
-          </a:p>
-          <a:p>
-            <a:pPr>
-              <a:spcAft>
-                <a:spcPts val="600"/>
-              </a:spcAft>
-            </a:pPr>
-            <a:r>
-              <a:rPr sz="1500">
-                <a:solidFill>
-                  <a:srgbClr val="22282E"/>
-                </a:solidFill>
-              </a:rPr>
-              <a:t>•  MITRE ATT&amp;CK — &lt;https://attack.mitre.org/&gt;</a:t>
-            </a:r>
-          </a:p>
-          <a:p>
-            <a:pPr>
-              <a:spcAft>
-                <a:spcPts val="600"/>
-              </a:spcAft>
-            </a:pPr>
-            <a:r>
-              <a:rPr sz="1500">
-                <a:solidFill>
-                  <a:srgbClr val="22282E"/>
-                </a:solidFill>
-              </a:rPr>
-              <a:t>•  Roth, F. y equipo SigmaHQ, documentación del proyecto.</a:t>
-            </a:r>
-          </a:p>
-        </p:txBody>
-      </p:sp>
+              <a:t>•  Escribe una regla Sigma para rundll32.exe con argumentos sospechosos.</a:t>
+            </a:r>
+          </a:p>
+          <a:p>
+            <a:pPr>
+              <a:spcAft>
+                <a:spcPts val="600"/>
+              </a:spcAft>
+            </a:pPr>
+            <a:r>
+              <a:rPr sz="1500">
+                <a:solidFill>
+                  <a:srgbClr val="22282E"/>
+                </a:solidFill>
+              </a:rPr>
+              <a:t>•  Añade modificadores |contains y |re para detectar PowerShell ofuscado.</a:t>
+            </a:r>
+          </a:p>
+          <a:p>
+            <a:pPr>
+              <a:spcAft>
+                <a:spcPts val="600"/>
+              </a:spcAft>
+            </a:pPr>
+            <a:r>
+              <a:rPr sz="1500">
+                <a:solidFill>
+                  <a:srgbClr val="22282E"/>
+                </a:solidFill>
+              </a:rPr>
+              <a:t>•  Convierte tu regla a dos backends distintos y compara la salida.</a:t>
+            </a:r>
+          </a:p>
+          <a:p>
+            <a:pPr>
+              <a:spcAft>
+                <a:spcPts val="600"/>
+              </a:spcAft>
+            </a:pPr>
+            <a:r>
+              <a:rPr sz="1500">
+                <a:solidFill>
+                  <a:srgbClr val="22282E"/>
+                </a:solidFill>
+              </a:rPr>
+              <a:t>•  Documenta 3 falsos positivos plausibles y añádelos al campo correspondiente.</a:t>
+            </a:r>
+          </a:p>
+          <a:p>
+            <a:pPr>
+              <a:spcAft>
+                <a:spcPts val="600"/>
+              </a:spcAft>
+            </a:pPr>
+            <a:r>
+              <a:rPr sz="1500">
+                <a:solidFill>
+                  <a:srgbClr val="22282E"/>
+                </a:solidFill>
+              </a:rPr>
+              <a:t>•  Mapea 5 reglas a sus técnicas ATT&amp;CK correctas.</a:t>
+            </a:r>
+          </a:p>
+          <a:p>
+            <a:pPr>
+              <a:spcAft>
+                <a:spcPts val="600"/>
+              </a:spcAft>
+            </a:pPr>
+            <a:r>
+              <a:rPr sz="1500">
+                <a:solidFill>
+                  <a:srgbClr val="22282E"/>
+                </a:solidFill>
+              </a:rPr>
+              <a:t>•  Crea una regla con condition de umbral (| count() by ... &gt; N).</a:t>
+            </a:r>
+          </a:p>
+        </p:txBody>
+      </p:sp>
+    </p:spTree>
+  </p:cSld>
+  <p:clrMapOvr>
+    <a:masterClrMapping/>
+  </p:clrMapOvr>
+</p:sld>
+</file>
+
+<file path=ppt/slides/slide13.xml><?xml version="1.0" encoding="utf-8"?>
+<p:sld xmlns:a="http://schemas.openxmlformats.org/drawingml/2006/main" xmlns:p="http://schemas.openxmlformats.org/presentationml/2006/main" xmlns:r="http://schemas.openxmlformats.org/officeDocument/2006/relationships">
+  <p:cSld>
+    <p:spTree>
+      <p:nvGrpSpPr>
+        <p:cNvPr id="1" name=""/>
+        <p:cNvGrpSpPr/>
+        <p:nvPr/>
+      </p:nvGrpSpPr>
+      <p:grpSpPr/>
+      <p:sp>
+        <p:nvSpPr>
+          <p:cNvPr id="2" name="TextBox 1"/>
+          <p:cNvSpPr txBox="1"/>
+          <p:nvPr/>
+        </p:nvSpPr>
+        <p:spPr>
+          <a:xfrm>
+            <a:off x="457200" y="320040"/>
+            <a:ext cx="8229600" cy="822960"/>
+          </a:xfrm>
+          <a:prstGeom prst="rect">
+            <a:avLst/>
+          </a:prstGeom>
+          <a:noFill/>
+        </p:spPr>
+        <p:txBody>
+          <a:bodyPr wrap="square">
+            <a:spAutoFit/>
+          </a:bodyPr>
+          <a:lstStyle/>
+          <a:p>
+            <a:r>
+              <a:rPr sz="2600" b="1">
+                <a:solidFill>
+                  <a:srgbClr val="0B3D2E"/>
+                </a:solidFill>
+              </a:rPr>
+              <a:t>📝 Reto verificable</a:t>
+            </a:r>
+          </a:p>
+        </p:txBody>
+      </p:sp>
+      <p:sp>
+        <p:nvSpPr>
+          <p:cNvPr id="3" name="TextBox 2"/>
+          <p:cNvSpPr txBox="1"/>
+          <p:nvPr/>
+        </p:nvSpPr>
+        <p:spPr>
+          <a:xfrm>
+            <a:off x="457200" y="1280160"/>
+            <a:ext cx="8229600" cy="4937760"/>
+          </a:xfrm>
+          <a:prstGeom prst="rect">
+            <a:avLst/>
+          </a:prstGeom>
+          <a:noFill/>
+        </p:spPr>
+        <p:txBody>
+          <a:bodyPr wrap="square">
+            <a:spAutoFit/>
+          </a:bodyPr>
+          <a:lstStyle/>
+          <a:p>
+            <a:pPr>
+              <a:spcAft>
+                <a:spcPts val="600"/>
+              </a:spcAft>
+            </a:pPr>
+            <a:r>
+              <a:rPr sz="1500">
+                <a:solidFill>
+                  <a:srgbClr val="22282E"/>
+                </a:solidFill>
+              </a:rPr>
+              <a:t>•  Entrega dos reglas Sigma propias (una de ejecución, una de persistencia) con tags ATT&amp;CK, falsos positivos documentados y sus conversiones a tu SIEM. Criterio de aceptación: al menos una regla, ya…</a:t>
+            </a:r>
+          </a:p>
+        </p:txBody>
+      </p:sp>
+    </p:spTree>
+  </p:cSld>
+  <p:clrMapOvr>
+    <a:masterClrMapping/>
+  </p:clrMapOvr>
+</p:sld>
+</file>
+
+<file path=ppt/slides/slide14.xml><?xml version="1.0" encoding="utf-8"?>
+<p:sld xmlns:a="http://schemas.openxmlformats.org/drawingml/2006/main" xmlns:p="http://schemas.openxmlformats.org/presentationml/2006/main" xmlns:r="http://schemas.openxmlformats.org/officeDocument/2006/relationships">
+  <p:cSld>
+    <p:spTree>
+      <p:nvGrpSpPr>
+        <p:cNvPr id="1" name=""/>
+        <p:cNvGrpSpPr/>
+        <p:nvPr/>
+      </p:nvGrpSpPr>
+      <p:grpSpPr/>
+      <p:sp>
+        <p:nvSpPr>
+          <p:cNvPr id="2" name="TextBox 1"/>
+          <p:cNvSpPr txBox="1"/>
+          <p:nvPr/>
+        </p:nvSpPr>
+        <p:spPr>
+          <a:xfrm>
+            <a:off x="457200" y="320040"/>
+            <a:ext cx="8229600" cy="822960"/>
+          </a:xfrm>
+          <a:prstGeom prst="rect">
+            <a:avLst/>
+          </a:prstGeom>
+          <a:noFill/>
+        </p:spPr>
+        <p:txBody>
+          <a:bodyPr wrap="square">
+            <a:spAutoFit/>
+          </a:bodyPr>
+          <a:lstStyle/>
+          <a:p>
+            <a:r>
+              <a:rPr sz="2600" b="1">
+                <a:solidFill>
+                  <a:srgbClr val="0B3D2E"/>
+                </a:solidFill>
+              </a:rPr>
+              <a:t>⚠️ Errores comunes</a:t>
+            </a:r>
+          </a:p>
+        </p:txBody>
+      </p:sp>
+      <p:sp>
+        <p:nvSpPr>
+          <p:cNvPr id="3" name="TextBox 2"/>
+          <p:cNvSpPr txBox="1"/>
+          <p:nvPr/>
+        </p:nvSpPr>
+        <p:spPr>
+          <a:xfrm>
+            <a:off x="457200" y="1280160"/>
+            <a:ext cx="8229600" cy="4937760"/>
+          </a:xfrm>
+          <a:prstGeom prst="rect">
+            <a:avLst/>
+          </a:prstGeom>
+          <a:noFill/>
+        </p:spPr>
+        <p:txBody>
+          <a:bodyPr wrap="square">
+            <a:spAutoFit/>
+          </a:bodyPr>
+          <a:lstStyle/>
+          <a:p>
+            <a:pPr>
+              <a:spcAft>
+                <a:spcPts val="600"/>
+              </a:spcAft>
+            </a:pPr>
+            <a:r>
+              <a:rPr sz="1500">
+                <a:solidFill>
+                  <a:srgbClr val="22282E"/>
+                </a:solidFill>
+              </a:rPr>
+              <a:t>•  sigma convert falla por pipeline — Falta el pipeline (ECS/CIM); instala/indica -p correcto</a:t>
+            </a:r>
+          </a:p>
+          <a:p>
+            <a:pPr>
+              <a:spcAft>
+                <a:spcPts val="600"/>
+              </a:spcAft>
+            </a:pPr>
+            <a:r>
+              <a:rPr sz="1500">
+                <a:solidFill>
+                  <a:srgbClr val="22282E"/>
+                </a:solidFill>
+              </a:rPr>
+              <a:t>•  La consulta no matchea campos — Nombres de campo distintos en tu SIEM; usa el pipeline de mapeo</a:t>
+            </a:r>
+          </a:p>
+          <a:p>
+            <a:pPr>
+              <a:spcAft>
+                <a:spcPts val="600"/>
+              </a:spcAft>
+            </a:pPr>
+            <a:r>
+              <a:rPr sz="1500">
+                <a:solidFill>
+                  <a:srgbClr val="22282E"/>
+                </a:solidFill>
+              </a:rPr>
+              <a:t>•  Regla dispara con todo — condition demasiado amplia; añade selecciones y filtros</a:t>
+            </a:r>
+          </a:p>
+          <a:p>
+            <a:pPr>
+              <a:spcAft>
+                <a:spcPts val="600"/>
+              </a:spcAft>
+            </a:pPr>
+            <a:r>
+              <a:rPr sz="1500">
+                <a:solidFill>
+                  <a:srgbClr val="22282E"/>
+                </a:solidFill>
+              </a:rPr>
+              <a:t>•  Esperabas que \ — contains fuera obligatorio para comodines</a:t>
+            </a:r>
+          </a:p>
+          <a:p>
+            <a:pPr>
+              <a:spcAft>
+                <a:spcPts val="600"/>
+              </a:spcAft>
+            </a:pPr>
+            <a:r>
+              <a:rPr sz="1500">
+                <a:solidFill>
+                  <a:srgbClr val="22282E"/>
+                </a:solidFill>
+              </a:rPr>
+              <a:t>•  YAML inválido — Indentación o listas mal formadas; valida con linter</a:t>
+            </a:r>
+          </a:p>
+        </p:txBody>
+      </p:sp>
+    </p:spTree>
+  </p:cSld>
+  <p:clrMapOvr>
+    <a:masterClrMapping/>
+  </p:clrMapOvr>
+</p:sld>
+</file>
+
+<file path=ppt/slides/slide15.xml><?xml version="1.0" encoding="utf-8"?>
+<p:sld xmlns:a="http://schemas.openxmlformats.org/drawingml/2006/main" xmlns:p="http://schemas.openxmlformats.org/presentationml/2006/main" xmlns:r="http://schemas.openxmlformats.org/officeDocument/2006/relationships">
+  <p:cSld>
+    <p:spTree>
+      <p:nvGrpSpPr>
+        <p:cNvPr id="1" name=""/>
+        <p:cNvGrpSpPr/>
+        <p:nvPr/>
+      </p:nvGrpSpPr>
+      <p:grpSpPr/>
+      <p:sp>
+        <p:nvSpPr>
+          <p:cNvPr id="2" name="TextBox 1"/>
+          <p:cNvSpPr txBox="1"/>
+          <p:nvPr/>
+        </p:nvSpPr>
+        <p:spPr>
+          <a:xfrm>
+            <a:off x="457200" y="320040"/>
+            <a:ext cx="8229600" cy="822960"/>
+          </a:xfrm>
+          <a:prstGeom prst="rect">
+            <a:avLst/>
+          </a:prstGeom>
+          <a:noFill/>
+        </p:spPr>
+        <p:txBody>
+          <a:bodyPr wrap="square">
+            <a:spAutoFit/>
+          </a:bodyPr>
+          <a:lstStyle/>
+          <a:p>
+            <a:r>
+              <a:rPr sz="2600" b="1">
+                <a:solidFill>
+                  <a:srgbClr val="0B3D2E"/>
+                </a:solidFill>
+              </a:rPr>
+              <a:t>❓ Preguntas frecuentes</a:t>
+            </a:r>
+          </a:p>
+        </p:txBody>
+      </p:sp>
+      <p:sp>
+        <p:nvSpPr>
+          <p:cNvPr id="3" name="TextBox 2"/>
+          <p:cNvSpPr txBox="1"/>
+          <p:nvPr/>
+        </p:nvSpPr>
+        <p:spPr>
+          <a:xfrm>
+            <a:off x="457200" y="1280160"/>
+            <a:ext cx="8229600" cy="4937760"/>
+          </a:xfrm>
+          <a:prstGeom prst="rect">
+            <a:avLst/>
+          </a:prstGeom>
+          <a:noFill/>
+        </p:spPr>
+        <p:txBody>
+          <a:bodyPr wrap="square">
+            <a:spAutoFit/>
+          </a:bodyPr>
+          <a:lstStyle/>
+          <a:p>
+            <a:pPr>
+              <a:spcAft>
+                <a:spcPts val="600"/>
+              </a:spcAft>
+            </a:pPr>
+            <a:r>
+              <a:rPr sz="1500">
+                <a:solidFill>
+                  <a:srgbClr val="22282E"/>
+                </a:solidFill>
+              </a:rPr>
+              <a:t>•  ❓ ¿Sigma reemplaza al lenguaje de mi SIEM?</a:t>
+            </a:r>
+          </a:p>
+          <a:p>
+            <a:pPr>
+              <a:spcAft>
+                <a:spcPts val="600"/>
+              </a:spcAft>
+            </a:pPr>
+            <a:r>
+              <a:rPr sz="1500">
+                <a:solidFill>
+                  <a:srgbClr val="22282E"/>
+                </a:solidFill>
+              </a:rPr>
+              <a:t>•  No lo reemplaza: lo genera. Escribes en Sigma y compilas a SPL/EQL/KQL. Ganas portabilidad y una única fuente de verdad para tus detecciones.</a:t>
+            </a:r>
+          </a:p>
+          <a:p>
+            <a:pPr>
+              <a:spcAft>
+                <a:spcPts val="600"/>
+              </a:spcAft>
+            </a:pPr>
+            <a:r>
+              <a:rPr sz="1500">
+                <a:solidFill>
+                  <a:srgbClr val="22282E"/>
+                </a:solidFill>
+              </a:rPr>
+              <a:t>•  ❓ ¿Puedo versionar mis reglas como código?</a:t>
+            </a:r>
+          </a:p>
+          <a:p>
+            <a:pPr>
+              <a:spcAft>
+                <a:spcPts val="600"/>
+              </a:spcAft>
+            </a:pPr>
+            <a:r>
+              <a:rPr sz="1500">
+                <a:solidFill>
+                  <a:srgbClr val="22282E"/>
+                </a:solidFill>
+              </a:rPr>
+              <a:t>•  Sí, y deberías. Guarda tu carpeta de reglas en un repositorio, con revisión y CI que valide sintaxis y conversión (detección como código, clase 199).</a:t>
+            </a:r>
+          </a:p>
+          <a:p>
+            <a:pPr>
+              <a:spcAft>
+                <a:spcPts val="600"/>
+              </a:spcAft>
+            </a:pPr>
+            <a:r>
+              <a:rPr sz="1500">
+                <a:solidFill>
+                  <a:srgbClr val="22282E"/>
+                </a:solidFill>
+              </a:rPr>
+              <a:t>•  ❓ ¿Debo usar las reglas de SigmaHQ tal cual?</a:t>
+            </a:r>
+          </a:p>
+          <a:p>
+            <a:pPr>
+              <a:spcAft>
+                <a:spcPts val="600"/>
+              </a:spcAft>
+            </a:pPr>
+            <a:r>
+              <a:rPr sz="1500">
+                <a:solidFill>
+                  <a:srgbClr val="22282E"/>
+                </a:solidFill>
+              </a:rPr>
+              <a:t>•  Úsalas como base, pero adáptalas: cada entorno tiene sus falsos positivos. Copiar sin afinar genera fatiga de alertas.</a:t>
+            </a:r>
+          </a:p>
+        </p:txBody>
+      </p:sp>
+    </p:spTree>
+  </p:cSld>
+  <p:clrMapOvr>
+    <a:masterClrMapping/>
+  </p:clrMapOvr>
+</p:sld>
+</file>
+
+<file path=ppt/slides/slide16.xml><?xml version="1.0" encoding="utf-8"?>
+<p:sld xmlns:a="http://schemas.openxmlformats.org/drawingml/2006/main" xmlns:p="http://schemas.openxmlformats.org/presentationml/2006/main" xmlns:r="http://schemas.openxmlformats.org/officeDocument/2006/relationships">
+  <p:cSld>
+    <p:spTree>
+      <p:nvGrpSpPr>
+        <p:cNvPr id="1" name=""/>
+        <p:cNvGrpSpPr/>
+        <p:nvPr/>
+      </p:nvGrpSpPr>
+      <p:grpSpPr/>
+      <p:sp>
+        <p:nvSpPr>
+          <p:cNvPr id="2" name="TextBox 1"/>
+          <p:cNvSpPr txBox="1"/>
+          <p:nvPr/>
+        </p:nvSpPr>
+        <p:spPr>
+          <a:xfrm>
+            <a:off x="457200" y="320040"/>
+            <a:ext cx="8229600" cy="822960"/>
+          </a:xfrm>
+          <a:prstGeom prst="rect">
+            <a:avLst/>
+          </a:prstGeom>
+          <a:noFill/>
+        </p:spPr>
+        <p:txBody>
+          <a:bodyPr wrap="square">
+            <a:spAutoFit/>
+          </a:bodyPr>
+          <a:lstStyle/>
+          <a:p>
+            <a:r>
+              <a:rPr sz="2600" b="1">
+                <a:solidFill>
+                  <a:srgbClr val="0B3D2E"/>
+                </a:solidFill>
+              </a:rPr>
+              <a:t>🔗 Referencias verificables y alcance</a:t>
+            </a:r>
+          </a:p>
+        </p:txBody>
+      </p:sp>
+      <p:sp>
+        <p:nvSpPr>
+          <p:cNvPr id="3" name="TextBox 2"/>
+          <p:cNvSpPr txBox="1"/>
+          <p:nvPr/>
+        </p:nvSpPr>
+        <p:spPr>
+          <a:xfrm>
+            <a:off x="457200" y="1280160"/>
+            <a:ext cx="8229600" cy="4937760"/>
+          </a:xfrm>
+          <a:prstGeom prst="rect">
+            <a:avLst/>
+          </a:prstGeom>
+          <a:noFill/>
+        </p:spPr>
+        <p:txBody>
+          <a:bodyPr wrap="square">
+            <a:spAutoFit/>
+          </a:bodyPr>
+          <a:lstStyle/>
+          <a:p>
+            <a:pPr>
+              <a:spcAft>
+                <a:spcPts val="600"/>
+              </a:spcAft>
+            </a:pPr>
+            <a:r>
+              <a:rPr sz="1500">
+                <a:solidFill>
+                  <a:srgbClr val="22282E"/>
+                </a:solidFill>
+              </a:rPr>
+              <a:t>•  Sigma Rules Specification 2.1.0: especificación oficial de estructura, logsource, detection, condición y metadatos —…</a:t>
+            </a:r>
+          </a:p>
+          <a:p>
+            <a:pPr>
+              <a:spcAft>
+                <a:spcPts val="600"/>
+              </a:spcAft>
+            </a:pPr>
+            <a:r>
+              <a:rPr sz="1500">
+                <a:solidFill>
+                  <a:srgbClr val="22282E"/>
+                </a:solidFill>
+              </a:rPr>
+              <a:t>•  Sigma Conditions: documentación oficial de expresiones, selecciones y cuantificadores usados en condition — &lt;https://sigmahq.io/docs/basics/conditions.html&gt;</a:t>
+            </a:r>
+          </a:p>
+          <a:p>
+            <a:pPr>
+              <a:spcAft>
+                <a:spcPts val="600"/>
+              </a:spcAft>
+            </a:pPr>
+            <a:r>
+              <a:rPr sz="1500">
+                <a:solidFill>
+                  <a:srgbClr val="22282E"/>
+                </a:solidFill>
+              </a:rPr>
+              <a:t>•  Sigma Modifiers: documentación oficial de transformaciones y de la semántica de all; el soporte final depende del backend — &lt;https://sigmahq.io/docs/basics/modifiers.html&gt;</a:t>
+            </a:r>
+          </a:p>
+          <a:p>
+            <a:pPr>
+              <a:spcAft>
+                <a:spcPts val="600"/>
+              </a:spcAft>
+            </a:pPr>
+            <a:r>
+              <a:rPr sz="1500">
+                <a:solidFill>
+                  <a:srgbClr val="22282E"/>
+                </a:solidFill>
+              </a:rPr>
+              <a:t>•  SigmaHQ Rules: repositorio comunitario mantenido por el proyecto; aporta ejemplos, pero cada regla exige adaptación y prueba local — &lt;https://github.com/SigmaHQ/sigma&gt;</a:t>
+            </a:r>
+          </a:p>
+          <a:p>
+            <a:pPr>
+              <a:spcAft>
+                <a:spcPts val="600"/>
+              </a:spcAft>
+            </a:pPr>
+            <a:r>
+              <a:rPr sz="1500">
+                <a:solidFill>
+                  <a:srgbClr val="22282E"/>
+                </a:solidFill>
+              </a:rPr>
+              <a:t>•  sigma-cli / pySigma: implementación oficial de conversión; una conversión válida no demuestra que los campos existan ni que la detección sea eficaz — &lt;https://github.com/SigmaHQ/sigma-cli&gt;</a:t>
+            </a:r>
+          </a:p>
+          <a:p>
+            <a:pPr>
+              <a:spcAft>
+                <a:spcPts val="600"/>
+              </a:spcAft>
+            </a:pPr>
+            <a:r>
+              <a:rPr sz="1500">
+                <a:solidFill>
+                  <a:srgbClr val="22282E"/>
+                </a:solidFill>
+              </a:rPr>
+              <a:t>•  MITRE ATT&amp;CK: fuente primaria para los identificadores de técnicas usados en etiquetas — &lt;https://attack.mitre.org/&gt;</a:t>
+            </a:r>
+          </a:p>
+        </p:txBody>
+      </p:sp>
+    </p:spTree>
+  </p:cSld>
+  <p:clrMapOvr>
+    <a:masterClrMapping/>
+  </p:clrMapOvr>
+</p:sld>
+</file>
+
+<file path=ppt/slides/slide17.xml><?xml version="1.0" encoding="utf-8"?>
+<p:sld xmlns:a="http://schemas.openxmlformats.org/drawingml/2006/main" xmlns:p="http://schemas.openxmlformats.org/presentationml/2006/main" xmlns:r="http://schemas.openxmlformats.org/officeDocument/2006/relationships">
+  <p:cSld>
+    <p:spTree>
+      <p:nvGrpSpPr>
+        <p:cNvPr id="1" name=""/>
+        <p:cNvGrpSpPr/>
+        <p:nvPr/>
+      </p:nvGrpSpPr>
+      <p:grpSpPr/>
+      <p:sp>
+        <p:nvSpPr>
+          <p:cNvPr id="2" name="TextBox 1"/>
+          <p:cNvSpPr txBox="1"/>
+          <p:nvPr/>
+        </p:nvSpPr>
+        <p:spPr>
+          <a:xfrm>
+            <a:off x="457200" y="274320"/>
+            <a:ext cx="8229600" cy="640080"/>
+          </a:xfrm>
+          <a:prstGeom prst="rect">
+            <a:avLst/>
+          </a:prstGeom>
+          <a:noFill/>
+        </p:spPr>
+        <p:txBody>
+          <a:bodyPr wrap="square">
+            <a:spAutoFit/>
+          </a:bodyPr>
+          <a:lstStyle/>
+          <a:p>
+            <a:r>
+              <a:rPr sz="2200" b="1">
+                <a:solidFill>
+                  <a:srgbClr val="0B3D2E"/>
+                </a:solidFill>
+              </a:rPr>
+              <a:t>Diagrama de la clase</a:t>
+            </a:r>
+          </a:p>
+        </p:txBody>
+      </p:sp>
+      <p:pic>
+        <p:nvPicPr>
+          <p:cNvPr id="3" name="Picture 2" descr="34197f41dbf15a42.png"/>
+          <p:cNvPicPr>
+            <a:picLocks noChangeAspect="1"/>
+          </p:cNvPicPr>
+          <p:nvPr/>
+        </p:nvPicPr>
+        <p:blipFill>
+          <a:blip r:embed="rId2"/>
+          <a:stretch>
+            <a:fillRect/>
+          </a:stretch>
+        </p:blipFill>
+        <p:spPr>
+          <a:xfrm>
+            <a:off x="457200" y="3392424"/>
+            <a:ext cx="8229600" cy="713232"/>
+          </a:xfrm>
+          <a:prstGeom prst="rect">
+            <a:avLst/>
+          </a:prstGeom>
+        </p:spPr>
+      </p:pic>
     </p:spTree>
   </p:cSld>
   <p:clrMapOvr>
@@ -3698,7 +4374,7 @@
                   <a:srgbClr val="22282E"/>
                 </a:solidFill>
               </a:rPr>
-              <a:t>•  Escribir reglas de detección portables en Sigma, el "YAML de las detecciones": un formato genérico que se convierte a la consulta nativa de cualquier SIEM (Splunk, Elastic, QRadar, etc.). Aprenderás la estructura de una regla, sus operadores lógicos, cómo evitar falsos positivos y cómo compilarla con sigma/pySigma a tu backend.</a:t>
+              <a:t>•  Escribir reglas de detección en Sigma como una representación portable de la intención. Aprenderás su estructura y operadores, cómo describir falsos positivos conocidos y cómo convertir con…</a:t>
             </a:r>
           </a:p>
         </p:txBody>
@@ -4092,7 +4768,7 @@
                   <a:srgbClr val="0B3D2E"/>
                 </a:solidFill>
               </a:rPr>
-              <a:t>📖 Definiciones y características</a:t>
+              <a:t>🧠 Explicación en profundidad</a:t>
             </a:r>
           </a:p>
         </p:txBody>
@@ -4130,97 +4806,97 @@
                   <a:srgbClr val="22282E"/>
                 </a:solidFill>
               </a:rPr>
-              <a:t>•  Sigma: formato abierto en YAML para describir detecciones de log de forma agnóstica al SIEM. Característica: portabilidad entre backends.</a:t>
-            </a:r>
-          </a:p>
-          <a:p>
-            <a:pPr>
-              <a:spcAft>
-                <a:spcPts val="600"/>
-              </a:spcAft>
-            </a:pPr>
-            <a:r>
-              <a:rPr sz="1500">
-                <a:solidFill>
-                  <a:srgbClr val="22282E"/>
-                </a:solidFill>
-              </a:rPr>
-              <a:t>•  logsource: define a qué tipo de log aplica la regla (product, category, service). Característica: enruta la regla a la fuente correcta.</a:t>
-            </a:r>
-          </a:p>
-          <a:p>
-            <a:pPr>
-              <a:spcAft>
-                <a:spcPts val="600"/>
-              </a:spcAft>
-            </a:pPr>
-            <a:r>
-              <a:rPr sz="1500">
-                <a:solidFill>
-                  <a:srgbClr val="22282E"/>
-                </a:solidFill>
-              </a:rPr>
-              <a:t>•  detection: bloque con una o más selecciones de campos/valores y la condition que las combina. Característica: núcleo lógico de la regla.</a:t>
-            </a:r>
-          </a:p>
-          <a:p>
-            <a:pPr>
-              <a:spcAft>
-                <a:spcPts val="600"/>
-              </a:spcAft>
-            </a:pPr>
-            <a:r>
-              <a:rPr sz="1500">
-                <a:solidFill>
-                  <a:srgbClr val="22282E"/>
-                </a:solidFill>
-              </a:rPr>
-              <a:t>•  condition: expresión booleana sobre las selecciones (selection and not filter). Característica: define cuándo dispara.</a:t>
-            </a:r>
-          </a:p>
-          <a:p>
-            <a:pPr>
-              <a:spcAft>
-                <a:spcPts val="600"/>
-              </a:spcAft>
-            </a:pPr>
-            <a:r>
-              <a:rPr sz="1500">
-                <a:solidFill>
-                  <a:srgbClr val="22282E"/>
-                </a:solidFill>
-              </a:rPr>
-              <a:t>•  Modificador: sufijo que altera el match (|contains, |endswith, |re, |base64). Característica: expresa coincidencias parciales o codificadas.</a:t>
-            </a:r>
-          </a:p>
-          <a:p>
-            <a:pPr>
-              <a:spcAft>
-                <a:spcPts val="600"/>
-              </a:spcAft>
-            </a:pPr>
-            <a:r>
-              <a:rPr sz="1500">
-                <a:solidFill>
-                  <a:srgbClr val="22282E"/>
-                </a:solidFill>
-              </a:rPr>
-              <a:t>•  falsepositives: campo que documenta causas benignas conocidas. Característica: ayuda al triaje y a afinar.</a:t>
-            </a:r>
-          </a:p>
-          <a:p>
-            <a:pPr>
-              <a:spcAft>
-                <a:spcPts val="600"/>
-              </a:spcAft>
-            </a:pPr>
-            <a:r>
-              <a:rPr sz="1500">
-                <a:solidFill>
-                  <a:srgbClr val="22282E"/>
-                </a:solidFill>
-              </a:rPr>
-              <a:t>•  pySigma / sigma-cli: herramienta que compila Sigma a la consulta del backend. Característica: soporta múltiples pipelines (ECS, Splunk CIM…).</a:t>
+              <a:t>•  Sigma describe una detección en formato independiente del SIEM, pero no promete «escribir una vez y ejecutar igual en todas partes». logsource expresa el dato esperado; detection selecciona eventos y…</a:t>
+            </a:r>
+          </a:p>
+          <a:p>
+            <a:pPr>
+              <a:spcAft>
+                <a:spcPts val="600"/>
+              </a:spcAft>
+            </a:pPr>
+            <a:r>
+              <a:rPr sz="1500">
+                <a:solidFill>
+                  <a:srgbClr val="22282E"/>
+                </a:solidFill>
+              </a:rPr>
+              <a:t>•  Las listas y selecciones poseen semántica booleana precisa; los modificadores cambian la comparación y los escapes dependen de la especificación. La validación cubre esquema, conversión, ejecución…</a:t>
+            </a:r>
+          </a:p>
+          <a:p>
+            <a:pPr>
+              <a:spcAft>
+                <a:spcPts val="600"/>
+              </a:spcAft>
+            </a:pPr>
+            <a:r>
+              <a:rPr sz="1500">
+                <a:solidFill>
+                  <a:srgbClr val="22282E"/>
+                </a:solidFill>
+              </a:rPr>
+              <a:t>•  «Detectar PowerShell» no es una hipótesis: describe una herramienta legítima y produciría ruido. Una formulación defendible podría ser: «un proceso de Office inicia un intérprete con argumentos de…</a:t>
+            </a:r>
+          </a:p>
+          <a:p>
+            <a:pPr>
+              <a:spcAft>
+                <a:spcPts val="600"/>
+              </a:spcAft>
+            </a:pPr>
+            <a:r>
+              <a:rPr sz="1500">
+                <a:solidFill>
+                  <a:srgbClr val="22282E"/>
+                </a:solidFill>
+              </a:rPr>
+              <a:t>•  En Sigma, selecciones separadas hacen visible el razonamiento. Una selección identifica padres de Office; otra intérpretes; otra términos de red. La condition decide si todas son necesarias o si…</a:t>
+            </a:r>
+          </a:p>
+          <a:p>
+            <a:pPr>
+              <a:spcAft>
+                <a:spcPts val="600"/>
+              </a:spcAft>
+            </a:pPr>
+            <a:r>
+              <a:rPr sz="1500">
+                <a:solidFill>
+                  <a:srgbClr val="22282E"/>
+                </a:solidFill>
+              </a:rPr>
+              <a:t>•  El diagrama muestra una compilación dependiente del entorno. El pipeline traduce nombres canónicos a campos reales y puede añadir condiciones. Un backend quizá sea sensible a mayúsculas, otro trate…</a:t>
+            </a:r>
+          </a:p>
+          <a:p>
+            <a:pPr>
+              <a:spcAft>
+                <a:spcPts val="600"/>
+              </a:spcAft>
+            </a:pPr>
+            <a:r>
+              <a:rPr sz="1500">
+                <a:solidFill>
+                  <a:srgbClr val="22282E"/>
+                </a:solidFill>
+              </a:rPr>
+              <a:t>•  Las pruebas cubren esquema, conversión, positivo, negativos representativos y rendimiento. También se prueba un campo ausente: decidir si no coincide o produce error forma parte del diseño. Regla…</a:t>
+            </a:r>
+          </a:p>
+          <a:p>
+            <a:pPr>
+              <a:spcAft>
+                <a:spcPts val="600"/>
+              </a:spcAft>
+            </a:pPr>
+            <a:r>
+              <a:rPr sz="1500">
+                <a:solidFill>
+                  <a:srgbClr val="22282E"/>
+                </a:solidFill>
+              </a:rPr>
+              <a:t>•  status comunica estabilidad; date y modified permiten revisar antigüedad; level orienta, pero la severidad final depende del activo; falsepositives enumera escenarios a investigar, no excepciones…</a:t>
             </a:r>
           </a:p>
         </p:txBody>
@@ -4271,7 +4947,7 @@
                   <a:srgbClr val="0B3D2E"/>
                 </a:solidFill>
               </a:rPr>
-              <a:t>🧰 Herramientas y preparación</a:t>
+              <a:t>📔 Glosario</a:t>
             </a:r>
           </a:p>
         </p:txBody>
@@ -4309,67 +4985,97 @@
                   <a:srgbClr val="22282E"/>
                 </a:solidFill>
               </a:rPr>
-              <a:t>•  sigma-cli (pip install sigma-cli) con los plugins de backend (sigma plugin install splunk, elasticsearch).</a:t>
-            </a:r>
-          </a:p>
-          <a:p>
-            <a:pPr>
-              <a:spcAft>
-                <a:spcPts val="600"/>
-              </a:spcAft>
-            </a:pPr>
-            <a:r>
-              <a:rPr sz="1500">
-                <a:solidFill>
-                  <a:srgbClr val="22282E"/>
-                </a:solidFill>
-              </a:rPr>
-              <a:t>•  El repositorio SigmaHQ clonado como referencia y banco de ejemplos.</a:t>
-            </a:r>
-          </a:p>
-          <a:p>
-            <a:pPr>
-              <a:spcAft>
-                <a:spcPts val="600"/>
-              </a:spcAft>
-            </a:pPr>
-            <a:r>
-              <a:rPr sz="1500">
-                <a:solidFill>
-                  <a:srgbClr val="22282E"/>
-                </a:solidFill>
-              </a:rPr>
-              <a:t>•  Un SIEM de las clases anteriores (Splunk o Elastic) para probar las conversiones.</a:t>
-            </a:r>
-          </a:p>
-          <a:p>
-            <a:pPr>
-              <a:spcAft>
-                <a:spcPts val="600"/>
-              </a:spcAft>
-            </a:pPr>
-            <a:r>
-              <a:rPr sz="1500">
-                <a:solidFill>
-                  <a:srgbClr val="22282E"/>
-                </a:solidFill>
-              </a:rPr>
-              <a:t>•  Un editor con validación YAML.</a:t>
-            </a:r>
-          </a:p>
-          <a:p>
-            <a:pPr>
-              <a:spcAft>
-                <a:spcPts val="600"/>
-              </a:spcAft>
-            </a:pPr>
-            <a:r>
-              <a:rPr sz="1500">
-                <a:solidFill>
-                  <a:srgbClr val="22282E"/>
-                </a:solidFill>
-              </a:rPr>
-              <a:t>•  Prueba las reglas contra datos de laboratorio o el dataset BOTS; no las apliques a sistemas ajenos.</a:t>
+              <a:t>•  Logsource: categoría, producto y servicio esperados.</a:t>
+            </a:r>
+          </a:p>
+          <a:p>
+            <a:pPr>
+              <a:spcAft>
+                <a:spcPts val="600"/>
+              </a:spcAft>
+            </a:pPr>
+            <a:r>
+              <a:rPr sz="1500">
+                <a:solidFill>
+                  <a:srgbClr val="22282E"/>
+                </a:solidFill>
+              </a:rPr>
+              <a:t>•  Selection: condiciones sobre campos.</a:t>
+            </a:r>
+          </a:p>
+          <a:p>
+            <a:pPr>
+              <a:spcAft>
+                <a:spcPts val="600"/>
+              </a:spcAft>
+            </a:pPr>
+            <a:r>
+              <a:rPr sz="1500">
+                <a:solidFill>
+                  <a:srgbClr val="22282E"/>
+                </a:solidFill>
+              </a:rPr>
+              <a:t>•  Condition: expresión booleana que combina selecciones.</a:t>
+            </a:r>
+          </a:p>
+          <a:p>
+            <a:pPr>
+              <a:spcAft>
+                <a:spcPts val="600"/>
+              </a:spcAft>
+            </a:pPr>
+            <a:r>
+              <a:rPr sz="1500">
+                <a:solidFill>
+                  <a:srgbClr val="22282E"/>
+                </a:solidFill>
+              </a:rPr>
+              <a:t>•  Modifier: transformación o comparación aplicada a un valor.</a:t>
+            </a:r>
+          </a:p>
+          <a:p>
+            <a:pPr>
+              <a:spcAft>
+                <a:spcPts val="600"/>
+              </a:spcAft>
+            </a:pPr>
+            <a:r>
+              <a:rPr sz="1500">
+                <a:solidFill>
+                  <a:srgbClr val="22282E"/>
+                </a:solidFill>
+              </a:rPr>
+              <a:t>•  Pipeline: mapeos previos a la conversión.</a:t>
+            </a:r>
+          </a:p>
+          <a:p>
+            <a:pPr>
+              <a:spcAft>
+                <a:spcPts val="600"/>
+              </a:spcAft>
+            </a:pPr>
+            <a:r>
+              <a:rPr sz="1500">
+                <a:solidFill>
+                  <a:srgbClr val="22282E"/>
+                </a:solidFill>
+              </a:rPr>
+              <a:t>•  Backend: plataforma que recibe la consulta traducida.</a:t>
+            </a:r>
+          </a:p>
+          <a:p>
+            <a:pPr>
+              <a:spcAft>
+                <a:spcPts val="600"/>
+              </a:spcAft>
+            </a:pPr>
+            <a:r>
+              <a:rPr sz="1500">
+                <a:solidFill>
+                  <a:srgbClr val="22282E"/>
+                </a:solidFill>
+              </a:rPr>
+              <a:t>•  Fixture: evento controlado para probar un resultado.</a:t>
             </a:r>
           </a:p>
         </p:txBody>
@@ -4420,7 +5126,7 @@
                   <a:srgbClr val="0B3D2E"/>
                 </a:solidFill>
               </a:rPr>
-              <a:t>🧪 Laboratorio guiado — De YAML a alerta</a:t>
+              <a:t>📖 Definiciones y características</a:t>
             </a:r>
           </a:p>
         </p:txBody>
@@ -4458,97 +5164,97 @@
                   <a:srgbClr val="22282E"/>
                 </a:solidFill>
               </a:rPr>
-              <a:t>•  Instala la CLI. pip install sigma-cli y luego sigma plugin install splunk elasticsearch.</a:t>
-            </a:r>
-          </a:p>
-          <a:p>
-            <a:pPr>
-              <a:spcAft>
-                <a:spcPts val="600"/>
-              </a:spcAft>
-            </a:pPr>
-            <a:r>
-              <a:rPr sz="1500">
-                <a:solidFill>
-                  <a:srgbClr val="22282E"/>
-                </a:solidFill>
-              </a:rPr>
-              <a:t>•  Escribe una regla. Guarda officespawnspowershell.yml:</a:t>
-            </a:r>
-          </a:p>
-          <a:p>
-            <a:pPr>
-              <a:spcAft>
-                <a:spcPts val="600"/>
-              </a:spcAft>
-            </a:pPr>
-            <a:r>
-              <a:rPr sz="1500">
-                <a:solidFill>
-                  <a:srgbClr val="22282E"/>
-                </a:solidFill>
-              </a:rPr>
-              <a:t>•  title: Office lanza PowerShell</a:t>
-            </a:r>
-          </a:p>
-          <a:p>
-            <a:pPr>
-              <a:spcAft>
-                <a:spcPts val="600"/>
-              </a:spcAft>
-            </a:pPr>
-            <a:r>
-              <a:rPr sz="1500">
-                <a:solidFill>
-                  <a:srgbClr val="22282E"/>
-                </a:solidFill>
-              </a:rPr>
-              <a:t>•  logsource:</a:t>
-            </a:r>
-          </a:p>
-          <a:p>
-            <a:pPr>
-              <a:spcAft>
-                <a:spcPts val="600"/>
-              </a:spcAft>
-            </a:pPr>
-            <a:r>
-              <a:rPr sz="1500">
-                <a:solidFill>
-                  <a:srgbClr val="22282E"/>
-                </a:solidFill>
-              </a:rPr>
-              <a:t>•  product: windows</a:t>
-            </a:r>
-          </a:p>
-          <a:p>
-            <a:pPr>
-              <a:spcAft>
-                <a:spcPts val="600"/>
-              </a:spcAft>
-            </a:pPr>
-            <a:r>
-              <a:rPr sz="1500">
-                <a:solidFill>
-                  <a:srgbClr val="22282E"/>
-                </a:solidFill>
-              </a:rPr>
-              <a:t>•  category: processcreation</a:t>
-            </a:r>
-          </a:p>
-          <a:p>
-            <a:pPr>
-              <a:spcAft>
-                <a:spcPts val="600"/>
-              </a:spcAft>
-            </a:pPr>
-            <a:r>
-              <a:rPr sz="1500">
-                <a:solidFill>
-                  <a:srgbClr val="22282E"/>
-                </a:solidFill>
-              </a:rPr>
-              <a:t>•  detection:</a:t>
+              <a:t>•  Sigma: formato abierto en YAML para describir detecciones de log de forma agnóstica al SIEM. Característica: portabilidad entre backends.</a:t>
+            </a:r>
+          </a:p>
+          <a:p>
+            <a:pPr>
+              <a:spcAft>
+                <a:spcPts val="600"/>
+              </a:spcAft>
+            </a:pPr>
+            <a:r>
+              <a:rPr sz="1500">
+                <a:solidFill>
+                  <a:srgbClr val="22282E"/>
+                </a:solidFill>
+              </a:rPr>
+              <a:t>•  logsource: define a qué tipo de log aplica la regla (product, category, service). Característica: enruta la regla a la fuente correcta.</a:t>
+            </a:r>
+          </a:p>
+          <a:p>
+            <a:pPr>
+              <a:spcAft>
+                <a:spcPts val="600"/>
+              </a:spcAft>
+            </a:pPr>
+            <a:r>
+              <a:rPr sz="1500">
+                <a:solidFill>
+                  <a:srgbClr val="22282E"/>
+                </a:solidFill>
+              </a:rPr>
+              <a:t>•  detection: bloque con una o más selecciones de campos/valores y la condition que las combina. Característica: núcleo lógico de la regla.</a:t>
+            </a:r>
+          </a:p>
+          <a:p>
+            <a:pPr>
+              <a:spcAft>
+                <a:spcPts val="600"/>
+              </a:spcAft>
+            </a:pPr>
+            <a:r>
+              <a:rPr sz="1500">
+                <a:solidFill>
+                  <a:srgbClr val="22282E"/>
+                </a:solidFill>
+              </a:rPr>
+              <a:t>•  condition: expresión booleana sobre las selecciones (selection and not filter). Característica: define cuándo dispara.</a:t>
+            </a:r>
+          </a:p>
+          <a:p>
+            <a:pPr>
+              <a:spcAft>
+                <a:spcPts val="600"/>
+              </a:spcAft>
+            </a:pPr>
+            <a:r>
+              <a:rPr sz="1500">
+                <a:solidFill>
+                  <a:srgbClr val="22282E"/>
+                </a:solidFill>
+              </a:rPr>
+              <a:t>•  Modificador: sufijo que altera el match (|contains, |endswith, |re, |base64). Característica: expresa coincidencias parciales o codificadas.</a:t>
+            </a:r>
+          </a:p>
+          <a:p>
+            <a:pPr>
+              <a:spcAft>
+                <a:spcPts val="600"/>
+              </a:spcAft>
+            </a:pPr>
+            <a:r>
+              <a:rPr sz="1500">
+                <a:solidFill>
+                  <a:srgbClr val="22282E"/>
+                </a:solidFill>
+              </a:rPr>
+              <a:t>•  falsepositives: campo que documenta causas benignas conocidas. Característica: ayuda al triaje y a afinar.</a:t>
+            </a:r>
+          </a:p>
+          <a:p>
+            <a:pPr>
+              <a:spcAft>
+                <a:spcPts val="600"/>
+              </a:spcAft>
+            </a:pPr>
+            <a:r>
+              <a:rPr sz="1500">
+                <a:solidFill>
+                  <a:srgbClr val="22282E"/>
+                </a:solidFill>
+              </a:rPr>
+              <a:t>•  pySigma / sigma-cli: herramienta que compila Sigma a la consulta del backend. Característica: soporta múltiples pipelines (ECS, Splunk CIM…).</a:t>
             </a:r>
           </a:p>
         </p:txBody>
@@ -4599,7 +5305,7 @@
                   <a:srgbClr val="0B3D2E"/>
                 </a:solidFill>
               </a:rPr>
-              <a:t>✍️ Ejercicios</a:t>
+              <a:t>🔍 Regla razonada — Office inicia un intérprete</a:t>
             </a:r>
           </a:p>
         </p:txBody>
@@ -4637,82 +5343,37 @@
                   <a:srgbClr val="22282E"/>
                 </a:solidFill>
               </a:rPr>
-              <a:t>•  Escribe una regla Sigma para rundll32.exe con argumentos sospechosos.</a:t>
-            </a:r>
-          </a:p>
-          <a:p>
-            <a:pPr>
-              <a:spcAft>
-                <a:spcPts val="600"/>
-              </a:spcAft>
-            </a:pPr>
-            <a:r>
-              <a:rPr sz="1500">
-                <a:solidFill>
-                  <a:srgbClr val="22282E"/>
-                </a:solidFill>
-              </a:rPr>
-              <a:t>•  Añade modificadores |contains y |re para detectar PowerShell ofuscado.</a:t>
-            </a:r>
-          </a:p>
-          <a:p>
-            <a:pPr>
-              <a:spcAft>
-                <a:spcPts val="600"/>
-              </a:spcAft>
-            </a:pPr>
-            <a:r>
-              <a:rPr sz="1500">
-                <a:solidFill>
-                  <a:srgbClr val="22282E"/>
-                </a:solidFill>
-              </a:rPr>
-              <a:t>•  Convierte tu regla a dos backends distintos y compara la salida.</a:t>
-            </a:r>
-          </a:p>
-          <a:p>
-            <a:pPr>
-              <a:spcAft>
-                <a:spcPts val="600"/>
-              </a:spcAft>
-            </a:pPr>
-            <a:r>
-              <a:rPr sz="1500">
-                <a:solidFill>
-                  <a:srgbClr val="22282E"/>
-                </a:solidFill>
-              </a:rPr>
-              <a:t>•  Documenta 3 falsos positivos plausibles y añádelos al campo correspondiente.</a:t>
-            </a:r>
-          </a:p>
-          <a:p>
-            <a:pPr>
-              <a:spcAft>
-                <a:spcPts val="600"/>
-              </a:spcAft>
-            </a:pPr>
-            <a:r>
-              <a:rPr sz="1500">
-                <a:solidFill>
-                  <a:srgbClr val="22282E"/>
-                </a:solidFill>
-              </a:rPr>
-              <a:t>•  Mapea 5 reglas a sus técnicas ATT&amp;CK correctas.</a:t>
-            </a:r>
-          </a:p>
-          <a:p>
-            <a:pPr>
-              <a:spcAft>
-                <a:spcPts val="600"/>
-              </a:spcAft>
-            </a:pPr>
-            <a:r>
-              <a:rPr sz="1500">
-                <a:solidFill>
-                  <a:srgbClr val="22282E"/>
-                </a:solidFill>
-              </a:rPr>
-              <a:t>•  Crea una regla con condition de umbral (| count() by ... &gt; N).</a:t>
+              <a:t>•  La conducta se divide en una selección de procesos padre (WINWORD.EXE, EXCEL.EXE), otra de hijos (powershell.exe, cmd.exe, wscript.exe) y, si los datos lo permiten, argumentos de descarga. La…</a:t>
+            </a:r>
+          </a:p>
+          <a:p>
+            <a:pPr>
+              <a:spcAft>
+                <a:spcPts val="600"/>
+              </a:spcAft>
+            </a:pPr>
+            <a:r>
+              <a:rPr sz="1500">
+                <a:solidFill>
+                  <a:srgbClr val="22282E"/>
+                </a:solidFill>
+              </a:rPr>
+              <a:t>•  El fixture positivo contiene campos mínimos y debe coincidir. Un negativo cercano usa PowerShell iniciado por una herramienta de administración aprobada y no debería hacerlo si la hipótesis exige…</a:t>
+            </a:r>
+          </a:p>
+          <a:p>
+            <a:pPr>
+              <a:spcAft>
+                <a:spcPts val="600"/>
+              </a:spcAft>
+            </a:pPr>
+            <a:r>
+              <a:rPr sz="1500">
+                <a:solidFill>
+                  <a:srgbClr val="22282E"/>
+                </a:solidFill>
+              </a:rPr>
+              <a:t>•  La regla se convierte con el pipeline de la organización. Se inspecciona la consulta resultante para comprobar rutas, escape y case sensitivity, luego se ejecuta contra el backend. Una segunda…</a:t>
             </a:r>
           </a:p>
         </p:txBody>
@@ -4763,7 +5424,7 @@
                   <a:srgbClr val="0B3D2E"/>
                 </a:solidFill>
               </a:rPr>
-              <a:t>📝 Reto verificable</a:t>
+              <a:t>✅ Criterio de dominio</a:t>
             </a:r>
           </a:p>
         </p:txBody>
@@ -4801,7 +5462,7 @@
                   <a:srgbClr val="22282E"/>
                 </a:solidFill>
               </a:rPr>
-              <a:t>•  Entrega dos reglas Sigma propias (una de ejecución, una de persistencia) con tags ATT&amp;CK, falsos positivos documentados y sus conversiones a tu SIEM. Criterio de aceptación: al menos una regla, ya convertida, dispara sobre tu actividad simulada en el SIEM y NO dispara con la actividad benigna de línea base; la CLI convierte ambas sin errores de sintaxis.</a:t>
+              <a:t>•  La entrega incluye hipótesis, logsource, lógica explicada, fixtures, consultas convertidas, resultado real, campos requeridos, falsos positivos contextualizados y dueño. Una regla que pasa validación…</a:t>
             </a:r>
           </a:p>
         </p:txBody>
